--- a/我在這裡.pptx
+++ b/我在這裡.pptx
@@ -112,6 +112,11 @@
       </a:defRPr>
     </a:lvl9pPr>
   </p:defaultTextStyle>
+  <p:extLst>
+    <p:ext uri="{EFAFB233-063F-42B5-8137-9DF3F51BA10A}">
+      <p15:sldGuideLst xmlns:p15="http://schemas.microsoft.com/office/powerpoint/2012/main"/>
+    </p:ext>
+  </p:extLst>
 </p:presentation>
 </file>
 
@@ -296,7 +301,7 @@
           <a:p>
             <a:fld id="{3BABE139-0C42-4901-9CA7-D2DCB45A34D1}" type="datetimeFigureOut">
               <a:rPr lang="en-US" smtClean="0"/>
-              <a:t>7/20/2024</a:t>
+              <a:t>8/1/2026</a:t>
             </a:fld>
             <a:endParaRPr lang="en-US"/>
           </a:p>
@@ -466,7 +471,7 @@
           <a:p>
             <a:fld id="{3BABE139-0C42-4901-9CA7-D2DCB45A34D1}" type="datetimeFigureOut">
               <a:rPr lang="en-US" smtClean="0"/>
-              <a:t>7/20/2024</a:t>
+              <a:t>8/1/2026</a:t>
             </a:fld>
             <a:endParaRPr lang="en-US"/>
           </a:p>
@@ -646,7 +651,7 @@
           <a:p>
             <a:fld id="{3BABE139-0C42-4901-9CA7-D2DCB45A34D1}" type="datetimeFigureOut">
               <a:rPr lang="en-US" smtClean="0"/>
-              <a:t>7/20/2024</a:t>
+              <a:t>8/1/2026</a:t>
             </a:fld>
             <a:endParaRPr lang="en-US"/>
           </a:p>
@@ -816,7 +821,7 @@
           <a:p>
             <a:fld id="{3BABE139-0C42-4901-9CA7-D2DCB45A34D1}" type="datetimeFigureOut">
               <a:rPr lang="en-US" smtClean="0"/>
-              <a:t>7/20/2024</a:t>
+              <a:t>8/1/2026</a:t>
             </a:fld>
             <a:endParaRPr lang="en-US"/>
           </a:p>
@@ -1062,7 +1067,7 @@
           <a:p>
             <a:fld id="{3BABE139-0C42-4901-9CA7-D2DCB45A34D1}" type="datetimeFigureOut">
               <a:rPr lang="en-US" smtClean="0"/>
-              <a:t>7/20/2024</a:t>
+              <a:t>8/1/2026</a:t>
             </a:fld>
             <a:endParaRPr lang="en-US"/>
           </a:p>
@@ -1350,7 +1355,7 @@
           <a:p>
             <a:fld id="{3BABE139-0C42-4901-9CA7-D2DCB45A34D1}" type="datetimeFigureOut">
               <a:rPr lang="en-US" smtClean="0"/>
-              <a:t>7/20/2024</a:t>
+              <a:t>8/1/2026</a:t>
             </a:fld>
             <a:endParaRPr lang="en-US"/>
           </a:p>
@@ -1772,7 +1777,7 @@
           <a:p>
             <a:fld id="{3BABE139-0C42-4901-9CA7-D2DCB45A34D1}" type="datetimeFigureOut">
               <a:rPr lang="en-US" smtClean="0"/>
-              <a:t>7/20/2024</a:t>
+              <a:t>8/1/2026</a:t>
             </a:fld>
             <a:endParaRPr lang="en-US"/>
           </a:p>
@@ -1890,7 +1895,7 @@
           <a:p>
             <a:fld id="{3BABE139-0C42-4901-9CA7-D2DCB45A34D1}" type="datetimeFigureOut">
               <a:rPr lang="en-US" smtClean="0"/>
-              <a:t>7/20/2024</a:t>
+              <a:t>8/1/2026</a:t>
             </a:fld>
             <a:endParaRPr lang="en-US"/>
           </a:p>
@@ -1985,7 +1990,7 @@
           <a:p>
             <a:fld id="{3BABE139-0C42-4901-9CA7-D2DCB45A34D1}" type="datetimeFigureOut">
               <a:rPr lang="en-US" smtClean="0"/>
-              <a:t>7/20/2024</a:t>
+              <a:t>8/1/2026</a:t>
             </a:fld>
             <a:endParaRPr lang="en-US"/>
           </a:p>
@@ -2262,7 +2267,7 @@
           <a:p>
             <a:fld id="{3BABE139-0C42-4901-9CA7-D2DCB45A34D1}" type="datetimeFigureOut">
               <a:rPr lang="en-US" smtClean="0"/>
-              <a:t>7/20/2024</a:t>
+              <a:t>8/1/2026</a:t>
             </a:fld>
             <a:endParaRPr lang="en-US"/>
           </a:p>
@@ -2519,7 +2524,7 @@
           <a:p>
             <a:fld id="{3BABE139-0C42-4901-9CA7-D2DCB45A34D1}" type="datetimeFigureOut">
               <a:rPr lang="en-US" smtClean="0"/>
-              <a:t>7/20/2024</a:t>
+              <a:t>8/1/2026</a:t>
             </a:fld>
             <a:endParaRPr lang="en-US"/>
           </a:p>
@@ -2735,7 +2740,7 @@
           <a:p>
             <a:fld id="{3BABE139-0C42-4901-9CA7-D2DCB45A34D1}" type="datetimeFigureOut">
               <a:rPr lang="en-US" smtClean="0"/>
-              <a:t>7/20/2024</a:t>
+              <a:t>8/1/2026</a:t>
             </a:fld>
             <a:endParaRPr lang="en-US"/>
           </a:p>
@@ -4014,7 +4019,39 @@
                 <a:latin typeface="微軟正黑體" pitchFamily="34" charset="-120"/>
                 <a:ea typeface="微軟正黑體" pitchFamily="34" charset="-120"/>
               </a:rPr>
-              <a:t>我在這裡  我在這裡  耶穌</a:t>
+              <a:t>我在這裡  </a:t>
+            </a:r>
+            <a:endParaRPr lang="en-US" altLang="zh-TW" sz="6400" b="1" dirty="0" smtClean="0">
+              <a:solidFill>
+                <a:srgbClr val="660033"/>
+              </a:solidFill>
+              <a:latin typeface="微軟正黑體" pitchFamily="34" charset="-120"/>
+              <a:ea typeface="微軟正黑體" pitchFamily="34" charset="-120"/>
+            </a:endParaRPr>
+          </a:p>
+          <a:p>
+            <a:pPr algn="ctr">
+              <a:buNone/>
+            </a:pPr>
+            <a:r>
+              <a:rPr lang="zh-TW" altLang="en-US" sz="6400" b="1" dirty="0" smtClean="0">
+                <a:solidFill>
+                  <a:srgbClr val="660033"/>
+                </a:solidFill>
+                <a:latin typeface="微軟正黑體" pitchFamily="34" charset="-120"/>
+                <a:ea typeface="微軟正黑體" pitchFamily="34" charset="-120"/>
+              </a:rPr>
+              <a:t>我</a:t>
+            </a:r>
+            <a:r>
+              <a:rPr lang="zh-TW" altLang="en-US" sz="6400" b="1" dirty="0">
+                <a:solidFill>
+                  <a:srgbClr val="660033"/>
+                </a:solidFill>
+                <a:latin typeface="微軟正黑體" pitchFamily="34" charset="-120"/>
+                <a:ea typeface="微軟正黑體" pitchFamily="34" charset="-120"/>
+              </a:rPr>
+              <a:t>在這裡  耶穌</a:t>
             </a:r>
             <a:endParaRPr lang="en-US" altLang="zh-TW" sz="6400" b="1" dirty="0">
               <a:solidFill>
@@ -4310,7 +4347,49 @@
                 <a:latin typeface="微軟正黑體" pitchFamily="34" charset="-120"/>
                 <a:ea typeface="微軟正黑體" pitchFamily="34" charset="-120"/>
               </a:rPr>
-              <a:t>我在這裡  我在這裡  耶穌</a:t>
+              <a:t>我在這</a:t>
+            </a:r>
+            <a:r>
+              <a:rPr lang="zh-TW" altLang="en-US" sz="6400" b="1" dirty="0" smtClean="0">
+                <a:solidFill>
+                  <a:srgbClr val="660033"/>
+                </a:solidFill>
+                <a:latin typeface="微軟正黑體" pitchFamily="34" charset="-120"/>
+                <a:ea typeface="微軟正黑體" pitchFamily="34" charset="-120"/>
+              </a:rPr>
+              <a:t>裡</a:t>
+            </a:r>
+            <a:endParaRPr lang="en-US" altLang="zh-TW" sz="6400" b="1" dirty="0" smtClean="0">
+              <a:solidFill>
+                <a:srgbClr val="660033"/>
+              </a:solidFill>
+              <a:latin typeface="微軟正黑體" pitchFamily="34" charset="-120"/>
+              <a:ea typeface="微軟正黑體" pitchFamily="34" charset="-120"/>
+            </a:endParaRPr>
+          </a:p>
+          <a:p>
+            <a:pPr algn="ctr">
+              <a:buNone/>
+            </a:pPr>
+            <a:r>
+              <a:rPr lang="zh-TW" altLang="en-US" sz="6400" b="1" dirty="0" smtClean="0">
+                <a:solidFill>
+                  <a:srgbClr val="660033"/>
+                </a:solidFill>
+                <a:latin typeface="微軟正黑體" pitchFamily="34" charset="-120"/>
+                <a:ea typeface="微軟正黑體" pitchFamily="34" charset="-120"/>
+              </a:rPr>
+              <a:t>我</a:t>
+            </a:r>
+            <a:r>
+              <a:rPr lang="zh-TW" altLang="en-US" sz="6400" b="1" dirty="0">
+                <a:solidFill>
+                  <a:srgbClr val="660033"/>
+                </a:solidFill>
+                <a:latin typeface="微軟正黑體" pitchFamily="34" charset="-120"/>
+                <a:ea typeface="微軟正黑體" pitchFamily="34" charset="-120"/>
+              </a:rPr>
+              <a:t>在這裡  耶穌</a:t>
             </a:r>
             <a:endParaRPr lang="en-US" altLang="zh-TW" sz="6400" b="1" dirty="0">
               <a:solidFill>
